--- a/youtube_ranking_20260509.pptx
+++ b/youtube_ranking_20260509.pptx
@@ -3474,7 +3474,7 @@
                 </a:solidFill>
                 <a:latin typeface="Arial"/>
               </a:rPr>
-              <a:t>👁  120,951 回視聴</a:t>
+              <a:t>👁  122,110 回視聴</a:t>
             </a:r>
           </a:p>
         </p:txBody>
@@ -3784,7 +3784,7 @@
                 </a:solidFill>
                 <a:latin typeface="Arial"/>
               </a:rPr>
-              <a:t>📺 夢追翔のJUKE BOX  ·  👁 569,206 回視聴</a:t>
+              <a:t>📺 夢追翔のJUKE BOX  ·  👁 580,319 回視聴</a:t>
             </a:r>
           </a:p>
         </p:txBody>
@@ -4050,7 +4050,7 @@
                 </a:solidFill>
                 <a:latin typeface="Arial"/>
               </a:rPr>
-              <a:t>📺 やっさん2  ·  👁 19,137,932 回視聴</a:t>
+              <a:t>📺 やっさん2  ·  👁 19,137,910 回視聴</a:t>
             </a:r>
           </a:p>
         </p:txBody>
@@ -4392,7 +4392,7 @@
                 </a:solidFill>
                 <a:latin typeface="Arial"/>
               </a:rPr>
-              <a:t>📺 ごっこ倶楽部のウラ垢 - STUDIO GOKKO -  ·  👁 12,780,639 回視聴</a:t>
+              <a:t>📺 ごっこ倶楽部のウラ垢 - STUDIO GOKKO -  ·  👁 12,780,643 回視聴</a:t>
             </a:r>
           </a:p>
         </p:txBody>
@@ -4563,7 +4563,7 @@
                 </a:solidFill>
                 <a:latin typeface="Arial"/>
               </a:rPr>
-              <a:t>📺 はるえもん  ·  👁 11,676,824 回視聴</a:t>
+              <a:t>📺 はるえもん  ·  👁 11,676,949 回視聴</a:t>
             </a:r>
           </a:p>
         </p:txBody>
@@ -4734,7 +4734,7 @@
                 </a:solidFill>
                 <a:latin typeface="Arial"/>
               </a:rPr>
-              <a:t>📺 やっさん2  ·  👁 11,437,569 回視聴</a:t>
+              <a:t>📺 やっさん2  ·  👁 11,437,791 回視聴</a:t>
             </a:r>
           </a:p>
         </p:txBody>
@@ -5000,7 +5000,7 @@
                 </a:solidFill>
                 <a:latin typeface="Arial"/>
               </a:rPr>
-              <a:t>📺 ウッドリィ  ·  👁 24,642,339 回視聴</a:t>
+              <a:t>📺 ウッドリィ  ·  👁 24,642,958 回視聴</a:t>
             </a:r>
           </a:p>
         </p:txBody>
@@ -5171,7 +5171,7 @@
                 </a:solidFill>
                 <a:latin typeface="Arial"/>
               </a:rPr>
-              <a:t>📺 にこみチャンネル  ·  👁 20,444,406 回視聴</a:t>
+              <a:t>📺 にこみチャンネル  ·  👁 20,444,408 回視聴</a:t>
             </a:r>
           </a:p>
         </p:txBody>
@@ -5342,7 +5342,7 @@
                 </a:solidFill>
                 <a:latin typeface="Arial"/>
               </a:rPr>
-              <a:t>📺 タン  ·  👁 19,793,045 回視聴</a:t>
+              <a:t>📺 タン  ·  👁 19,793,067 回視聴</a:t>
             </a:r>
           </a:p>
         </p:txBody>
@@ -5684,7 +5684,7 @@
                 </a:solidFill>
                 <a:latin typeface="Arial"/>
               </a:rPr>
-              <a:t>📺 葉ちゅべ  ·  👁 18,292,248 回視聴</a:t>
+              <a:t>📺 葉ちゅべ  ·  👁 18,292,383 回視聴</a:t>
             </a:r>
           </a:p>
         </p:txBody>
@@ -5950,7 +5950,7 @@
                 </a:solidFill>
                 <a:latin typeface="Arial"/>
               </a:rPr>
-              <a:t>📺 Mrs. GREEN APPLE  ·  👁 51,860,099 回視聴</a:t>
+              <a:t>📺 Mrs. GREEN APPLE  ·  👁 51,861,809 回視聴</a:t>
             </a:r>
           </a:p>
         </p:txBody>
@@ -6121,7 +6121,7 @@
                 </a:solidFill>
                 <a:latin typeface="Arial"/>
               </a:rPr>
-              <a:t>📺 アニメキッズanimekids  ·  👁 44,709,710 回視聴</a:t>
+              <a:t>📺 アニメキッズanimekids  ·  👁 44,709,983 回視聴</a:t>
             </a:r>
           </a:p>
         </p:txBody>
@@ -6292,7 +6292,7 @@
                 </a:solidFill>
                 <a:latin typeface="Arial"/>
               </a:rPr>
-              <a:t>📺 アイナ・ジ・エンド Official  ·  👁 41,899,595 回視聴</a:t>
+              <a:t>📺 アイナ・ジ・エンド Official  ·  👁 41,902,647 回視聴</a:t>
             </a:r>
           </a:p>
         </p:txBody>
@@ -6463,7 +6463,7 @@
                 </a:solidFill>
                 <a:latin typeface="Arial"/>
               </a:rPr>
-              <a:t>📺 ノッカーナアニメーション nokkana animation  ·  👁 41,161,721 回視聴</a:t>
+              <a:t>📺 ノッカーナアニメーション nokkana animation  ·  👁 41,161,928 回視聴</a:t>
             </a:r>
           </a:p>
         </p:txBody>
@@ -6634,7 +6634,7 @@
                 </a:solidFill>
                 <a:latin typeface="Arial"/>
               </a:rPr>
-              <a:t>📺 TOHO animation チャンネル  ·  👁 33,087,585 回視聴</a:t>
+              <a:t>📺 TOHO animation チャンネル  ·  👁 33,091,742 回視聴</a:t>
             </a:r>
           </a:p>
         </p:txBody>
@@ -7071,7 +7071,7 @@
                 </a:solidFill>
                 <a:latin typeface="Arial"/>
               </a:rPr>
-              <a:t>📺 KABUKU. / 市川團十郎。  ·  👁 3,483,843 回視聴</a:t>
+              <a:t>📺 KABUKU. / 市川團十郎。  ·  👁 3,483,848 回視聴</a:t>
             </a:r>
           </a:p>
         </p:txBody>
@@ -7242,7 +7242,7 @@
                 </a:solidFill>
                 <a:latin typeface="Arial"/>
               </a:rPr>
-              <a:t>📺 東海オンエア  ·  👁 3,297,552 回視聴</a:t>
+              <a:t>📺 東海オンエア  ·  👁 3,297,635 回視聴</a:t>
             </a:r>
           </a:p>
         </p:txBody>
@@ -7584,7 +7584,7 @@
                 </a:solidFill>
                 <a:latin typeface="Arial"/>
               </a:rPr>
-              <a:t>📺 2ch有益プラネット【ゆっくり解説】  ·  👁 2,937,971 回視聴</a:t>
+              <a:t>📺 2ch有益プラネット【ゆっくり解説】  ·  👁 2,938,092 回視聴</a:t>
             </a:r>
           </a:p>
         </p:txBody>
@@ -7737,7 +7737,7 @@
                 </a:solidFill>
                 <a:latin typeface="Arial"/>
               </a:rPr>
-              <a:t>King &amp; Prince「Stereo Love」-STARRING LIVE ver.-</a:t>
+              <a:t>『ルージュの伝言｜松任谷由実』 acoustic cover.</a:t>
             </a:r>
           </a:p>
         </p:txBody>
@@ -7771,7 +7771,7 @@
                 </a:solidFill>
                 <a:latin typeface="Arial"/>
               </a:rPr>
-              <a:t>📺  King &amp; Prince</a:t>
+              <a:t>📺  優里ちゃんねる【公式】</a:t>
             </a:r>
           </a:p>
         </p:txBody>
@@ -7805,7 +7805,7 @@
                 </a:solidFill>
                 <a:latin typeface="Arial"/>
               </a:rPr>
-              <a:t>👁  167,701 回視聴</a:t>
+              <a:t>👁  46,525 回視聴</a:t>
             </a:r>
           </a:p>
         </p:txBody>
@@ -7839,7 +7839,7 @@
                 </a:solidFill>
                 <a:latin typeface="Arial"/>
               </a:rPr>
-              <a:t>https://www.youtube.com/watch?v=ZICsvkMUjXM</a:t>
+              <a:t>https://www.youtube.com/watch?v=7DbiY5492zU</a:t>
             </a:r>
           </a:p>
         </p:txBody>
@@ -7992,7 +7992,7 @@
                 </a:solidFill>
                 <a:latin typeface="Arial"/>
               </a:rPr>
-              <a:t>助けて！南極で遭難したらバケモノに襲われました！【マイクラ】</a:t>
+              <a:t>VCT Pacific 2026 : STAGE 1 - PLAYOFFS - DAY 3</a:t>
             </a:r>
           </a:p>
         </p:txBody>
@@ -8026,7 +8026,7 @@
                 </a:solidFill>
                 <a:latin typeface="Arial"/>
               </a:rPr>
-              <a:t>📺  ドズル社</a:t>
+              <a:t>📺  VALORANT // JAPAN</a:t>
             </a:r>
           </a:p>
         </p:txBody>
@@ -8060,7 +8060,7 @@
                 </a:solidFill>
                 <a:latin typeface="Arial"/>
               </a:rPr>
-              <a:t>👁  128,248 回視聴</a:t>
+              <a:t>👁  318,668 回視聴</a:t>
             </a:r>
           </a:p>
         </p:txBody>
@@ -8094,7 +8094,7 @@
                 </a:solidFill>
                 <a:latin typeface="Arial"/>
               </a:rPr>
-              <a:t>https://www.youtube.com/watch?v=B2Ls1HrcjJI</a:t>
+              <a:t>https://www.youtube.com/watch?v=cswQzsSVfuo</a:t>
             </a:r>
           </a:p>
         </p:txBody>
@@ -8315,7 +8315,7 @@
                 </a:solidFill>
                 <a:latin typeface="Arial"/>
               </a:rPr>
-              <a:t>👁  157,115 回視聴</a:t>
+              <a:t>👁  163,873 回視聴</a:t>
             </a:r>
           </a:p>
         </p:txBody>
@@ -8570,7 +8570,7 @@
                 </a:solidFill>
                 <a:latin typeface="Arial"/>
               </a:rPr>
-              <a:t>👁  92,875 回視聴</a:t>
+              <a:t>👁  150,941 回視聴</a:t>
             </a:r>
           </a:p>
         </p:txBody>
@@ -8825,7 +8825,7 @@
                 </a:solidFill>
                 <a:latin typeface="Arial"/>
               </a:rPr>
-              <a:t>👁  209,213 回視聴</a:t>
+              <a:t>👁  211,341 回視聴</a:t>
             </a:r>
           </a:p>
         </p:txBody>
@@ -9012,7 +9012,7 @@
                 </a:solidFill>
                 <a:latin typeface="Arial"/>
               </a:rPr>
-              <a:t>【対決】1日かけてポケGOで捕まえたポケモン同士を戦わせたらまさかの結果に！？！！</a:t>
+              <a:t>5980円とは思えないGと戦うレベルのクソゲー【テラフォーマーズ 紅き惑星の激闘】</a:t>
             </a:r>
           </a:p>
         </p:txBody>
@@ -9046,7 +9046,7 @@
                 </a:solidFill>
                 <a:latin typeface="Arial"/>
               </a:rPr>
-              <a:t>📺  Lazy Lie Crazy【レイクレ】</a:t>
+              <a:t>📺  からすまAチャンネル</a:t>
             </a:r>
           </a:p>
         </p:txBody>
@@ -9080,7 +9080,7 @@
                 </a:solidFill>
                 <a:latin typeface="Arial"/>
               </a:rPr>
-              <a:t>👁  113,950 回視聴</a:t>
+              <a:t>👁  171,094 回視聴</a:t>
             </a:r>
           </a:p>
         </p:txBody>
@@ -9114,7 +9114,7 @@
                 </a:solidFill>
                 <a:latin typeface="Arial"/>
               </a:rPr>
-              <a:t>https://www.youtube.com/watch?v=G1w-XgyfbLM</a:t>
+              <a:t>https://www.youtube.com/watch?v=neuBI7GCc8o</a:t>
             </a:r>
           </a:p>
         </p:txBody>
@@ -9335,7 +9335,7 @@
                 </a:solidFill>
                 <a:latin typeface="Arial"/>
               </a:rPr>
-              <a:t>👁  331,828 回視聴</a:t>
+              <a:t>👁  345,141 回視聴</a:t>
             </a:r>
           </a:p>
         </p:txBody>
@@ -9522,7 +9522,7 @@
                 </a:solidFill>
                 <a:latin typeface="Arial"/>
               </a:rPr>
-              <a:t>5980円とは思えないGと戦うレベルのクソゲー【テラフォーマーズ 紅き惑星の激闘】</a:t>
+              <a:t>【対決】1日かけてポケGOで捕まえたポケモン同士を戦わせたらまさかの結果に！？！！</a:t>
             </a:r>
           </a:p>
         </p:txBody>
@@ -9556,7 +9556,7 @@
                 </a:solidFill>
                 <a:latin typeface="Arial"/>
               </a:rPr>
-              <a:t>📺  からすまAチャンネル</a:t>
+              <a:t>📺  Lazy Lie Crazy【レイクレ】</a:t>
             </a:r>
           </a:p>
         </p:txBody>
@@ -9590,7 +9590,7 @@
                 </a:solidFill>
                 <a:latin typeface="Arial"/>
               </a:rPr>
-              <a:t>👁  150,537 回視聴</a:t>
+              <a:t>👁  134,370 回視聴</a:t>
             </a:r>
           </a:p>
         </p:txBody>
@@ -9624,7 +9624,7 @@
                 </a:solidFill>
                 <a:latin typeface="Arial"/>
               </a:rPr>
-              <a:t>https://www.youtube.com/watch?v=neuBI7GCc8o</a:t>
+              <a:t>https://www.youtube.com/watch?v=G1w-XgyfbLM</a:t>
             </a:r>
           </a:p>
         </p:txBody>
